--- a/Introduccion a la Ingenieria/Clases/Clase 4 - Principios eticos en la Ingenieria/Presentacion.pptx
+++ b/Introduccion a la Ingenieria/Clases/Clase 4 - Principios eticos en la Ingenieria/Presentacion.pptx
@@ -5860,7 +5860,7 @@
               </a:spcAft>
             </a:pPr>
             <a:r>
-              <a:rPr sz="1600" b="0" i="0">
+              <a:rPr sz="2000" b="0" i="0">
                 <a:solidFill>
                   <a:srgbClr val="333333"/>
                 </a:solidFill>
@@ -5869,7 +5869,7 @@
               <a:t>–   </a:t>
             </a:r>
             <a:r>
-              <a:rPr sz="1600" b="1" i="0">
+              <a:rPr sz="2000" b="1" i="0">
                 <a:solidFill>
                   <a:srgbClr val="333333"/>
                 </a:solidFill>
@@ -5878,7 +5878,7 @@
               <a:t>Trabajo dirigido:</a:t>
             </a:r>
             <a:r>
-              <a:rPr sz="1600" b="0" i="0">
+              <a:rPr sz="2000" b="0" i="0">
                 <a:solidFill>
                   <a:srgbClr val="333333"/>
                 </a:solidFill>
@@ -5894,7 +5894,7 @@
               </a:spcAft>
             </a:pPr>
             <a:r>
-              <a:rPr sz="1600" b="0" i="0">
+              <a:rPr sz="2000" b="0" i="0">
                 <a:solidFill>
                   <a:srgbClr val="333333"/>
                 </a:solidFill>
@@ -5903,7 +5903,7 @@
               <a:t>–   </a:t>
             </a:r>
             <a:r>
-              <a:rPr sz="1600" b="1" i="0">
+              <a:rPr sz="2000" b="1" i="0">
                 <a:solidFill>
                   <a:srgbClr val="333333"/>
                 </a:solidFill>
@@ -5912,7 +5912,7 @@
               <a:t>Trabajo independiente:</a:t>
             </a:r>
             <a:r>
-              <a:rPr sz="1600" b="0" i="0">
+              <a:rPr sz="2000" b="0" i="0">
                 <a:solidFill>
                   <a:srgbClr val="333333"/>
                 </a:solidFill>
@@ -5921,7 +5921,7 @@
               <a:t> Análisis crítico del código ético: media página sobre </a:t>
             </a:r>
             <a:r>
-              <a:rPr sz="1600" b="1" i="0">
+              <a:rPr sz="2000" b="1" i="0">
                 <a:solidFill>
                   <a:srgbClr val="333333"/>
                 </a:solidFill>
@@ -5930,7 +5930,7 @@
               <a:t>un principio que su equipo cree difícil de cumplir en la práctica</a:t>
             </a:r>
             <a:r>
-              <a:rPr sz="1600" b="0" i="0">
+              <a:rPr sz="2000" b="0" i="0">
                 <a:solidFill>
                   <a:srgbClr val="333333"/>
                 </a:solidFill>
@@ -5946,7 +5946,7 @@
               </a:spcAft>
             </a:pPr>
             <a:r>
-              <a:rPr sz="1600" b="0" i="0">
+              <a:rPr sz="2000" b="0" i="0">
                 <a:solidFill>
                   <a:srgbClr val="333333"/>
                 </a:solidFill>
@@ -5955,7 +5955,7 @@
               <a:t>–   </a:t>
             </a:r>
             <a:r>
-              <a:rPr sz="1600" b="1" i="0">
+              <a:rPr sz="2000" b="1" i="0">
                 <a:solidFill>
                   <a:srgbClr val="333333"/>
                 </a:solidFill>
@@ -5964,7 +5964,7 @@
               <a:t>Sesión 5 · El rol del ingeniero en el contexto ambiental</a:t>
             </a:r>
             <a:r>
-              <a:rPr sz="1600" b="0" i="0">
+              <a:rPr sz="2000" b="0" i="0">
                 <a:solidFill>
                   <a:srgbClr val="333333"/>
                 </a:solidFill>
@@ -5980,7 +5980,7 @@
               </a:spcAft>
             </a:pPr>
             <a:r>
-              <a:rPr sz="1600" b="0" i="0">
+              <a:rPr sz="2000" b="0" i="0">
                 <a:solidFill>
                   <a:srgbClr val="333333"/>
                 </a:solidFill>
@@ -5989,7 +5989,7 @@
               <a:t>–   </a:t>
             </a:r>
             <a:r>
-              <a:rPr sz="1600" b="1" i="0">
+              <a:rPr sz="2000" b="1" i="0">
                 <a:solidFill>
                   <a:srgbClr val="333333"/>
                 </a:solidFill>
@@ -5998,7 +5998,7 @@
               <a:t>Aviso:</a:t>
             </a:r>
             <a:r>
-              <a:rPr sz="1600" b="0" i="0">
+              <a:rPr sz="2000" b="0" i="0">
                 <a:solidFill>
                   <a:srgbClr val="333333"/>
                 </a:solidFill>
@@ -6014,7 +6014,7 @@
               </a:spcAft>
             </a:pPr>
             <a:r>
-              <a:rPr sz="1600" b="0" i="0">
+              <a:rPr sz="2000" b="0" i="0">
                 <a:solidFill>
                   <a:srgbClr val="333333"/>
                 </a:solidFill>
@@ -6023,7 +6023,7 @@
               <a:t>–   </a:t>
             </a:r>
             <a:r>
-              <a:rPr sz="1600" b="1" i="0">
+              <a:rPr sz="2000" b="1" i="0">
                 <a:solidFill>
                   <a:srgbClr val="333333"/>
                 </a:solidFill>
@@ -6032,7 +6032,7 @@
               <a:t>Antes de salir:</a:t>
             </a:r>
             <a:r>
-              <a:rPr sz="1600" b="0" i="0">
+              <a:rPr sz="2000" b="0" i="0">
                 <a:solidFill>
                   <a:srgbClr val="333333"/>
                 </a:solidFill>
@@ -6606,7 +6606,7 @@
         <p:spPr>
           <a:xfrm>
             <a:off x="502920" y="2798064"/>
-            <a:ext cx="2164019" cy="2560320"/>
+            <a:ext cx="2164019" cy="3099816"/>
           </a:xfrm>
           <a:prstGeom prst="rect">
             <a:avLst/>
@@ -6721,7 +6721,7 @@
         <p:spPr>
           <a:xfrm>
             <a:off x="2758379" y="2798064"/>
-            <a:ext cx="2164019" cy="2560320"/>
+            <a:ext cx="2164019" cy="3099816"/>
           </a:xfrm>
           <a:prstGeom prst="rect">
             <a:avLst/>
@@ -6836,7 +6836,7 @@
         <p:spPr>
           <a:xfrm>
             <a:off x="5013838" y="2798064"/>
-            <a:ext cx="2164019" cy="2560320"/>
+            <a:ext cx="2164019" cy="3099816"/>
           </a:xfrm>
           <a:prstGeom prst="rect">
             <a:avLst/>
@@ -6951,7 +6951,7 @@
         <p:spPr>
           <a:xfrm>
             <a:off x="7269297" y="2798064"/>
-            <a:ext cx="2164019" cy="2560320"/>
+            <a:ext cx="2164019" cy="3099816"/>
           </a:xfrm>
           <a:prstGeom prst="rect">
             <a:avLst/>
@@ -7066,7 +7066,7 @@
         <p:spPr>
           <a:xfrm>
             <a:off x="9524756" y="2798064"/>
-            <a:ext cx="2164019" cy="2560320"/>
+            <a:ext cx="2164019" cy="3099816"/>
           </a:xfrm>
           <a:prstGeom prst="rect">
             <a:avLst/>
@@ -7100,8 +7100,8 @@
         </p:nvSpPr>
         <p:spPr>
           <a:xfrm>
-            <a:off x="457200" y="5943600"/>
-            <a:ext cx="11277295" cy="365760"/>
+            <a:off x="457200" y="5806440"/>
+            <a:ext cx="11277295" cy="640080"/>
           </a:xfrm>
           <a:prstGeom prst="rect">
             <a:avLst/>
@@ -7354,7 +7354,7 @@
               </a:spcAft>
             </a:pPr>
             <a:r>
-              <a:rPr sz="1600" b="0" i="0">
+              <a:rPr sz="2000" b="0" i="0">
                 <a:solidFill>
                   <a:srgbClr val="333333"/>
                 </a:solidFill>
@@ -7363,7 +7363,7 @@
               <a:t>–   Distinguir un </a:t>
             </a:r>
             <a:r>
-              <a:rPr sz="1600" b="1" i="0">
+              <a:rPr sz="2000" b="1" i="0">
                 <a:solidFill>
                   <a:srgbClr val="333333"/>
                 </a:solidFill>
@@ -7372,7 +7372,7 @@
               <a:t>problema ético</a:t>
             </a:r>
             <a:r>
-              <a:rPr sz="1600" b="0" i="0">
+              <a:rPr sz="2000" b="0" i="0">
                 <a:solidFill>
                   <a:srgbClr val="333333"/>
                 </a:solidFill>
@@ -7388,7 +7388,7 @@
               </a:spcAft>
             </a:pPr>
             <a:r>
-              <a:rPr sz="1600" b="0" i="0">
+              <a:rPr sz="2000" b="0" i="0">
                 <a:solidFill>
                   <a:srgbClr val="333333"/>
                 </a:solidFill>
@@ -7397,7 +7397,7 @@
               <a:t>–   Usar los principios del </a:t>
             </a:r>
             <a:r>
-              <a:rPr sz="1600" b="1" i="0">
+              <a:rPr sz="2000" b="1" i="0">
                 <a:solidFill>
                   <a:srgbClr val="333333"/>
                 </a:solidFill>
@@ -7406,7 +7406,7 @@
               <a:t>código de ética de ACM/IEEE</a:t>
             </a:r>
             <a:r>
-              <a:rPr sz="1600" b="0" i="0">
+              <a:rPr sz="2000" b="0" i="0">
                 <a:solidFill>
                   <a:srgbClr val="333333"/>
                 </a:solidFill>
@@ -7415,7 +7415,7 @@
               <a:t> y de la </a:t>
             </a:r>
             <a:r>
-              <a:rPr sz="1600" b="1" i="0">
+              <a:rPr sz="2000" b="1" i="0">
                 <a:solidFill>
                   <a:srgbClr val="333333"/>
                 </a:solidFill>
@@ -7424,7 +7424,7 @@
               <a:t>Ley 842 de 2003</a:t>
             </a:r>
             <a:r>
-              <a:rPr sz="1600" b="0" i="0">
+              <a:rPr sz="2000" b="0" i="0">
                 <a:solidFill>
                   <a:srgbClr val="333333"/>
                 </a:solidFill>
@@ -7440,7 +7440,7 @@
               </a:spcAft>
             </a:pPr>
             <a:r>
-              <a:rPr sz="1600" b="0" i="0">
+              <a:rPr sz="2000" b="0" i="0">
                 <a:solidFill>
                   <a:srgbClr val="333333"/>
                 </a:solidFill>
@@ -7449,7 +7449,7 @@
               <a:t>–   Nombrar </a:t>
             </a:r>
             <a:r>
-              <a:rPr sz="1600" b="1" i="0">
+              <a:rPr sz="2000" b="1" i="0">
                 <a:solidFill>
                   <a:srgbClr val="333333"/>
                 </a:solidFill>
@@ -7458,7 +7458,7 @@
               <a:t>tres normas colombianas</a:t>
             </a:r>
             <a:r>
-              <a:rPr sz="1600" b="0" i="0">
+              <a:rPr sz="2000" b="0" i="0">
                 <a:solidFill>
                   <a:srgbClr val="333333"/>
                 </a:solidFill>
@@ -7474,7 +7474,7 @@
               </a:spcAft>
             </a:pPr>
             <a:r>
-              <a:rPr sz="1600" b="0" i="0">
+              <a:rPr sz="2000" b="0" i="0">
                 <a:solidFill>
                   <a:srgbClr val="333333"/>
                 </a:solidFill>
@@ -7483,7 +7483,7 @@
               <a:t>–   Identificar en un caso real </a:t>
             </a:r>
             <a:r>
-              <a:rPr sz="1600" b="1" i="0">
+              <a:rPr sz="2000" b="1" i="0">
                 <a:solidFill>
                   <a:srgbClr val="333333"/>
                 </a:solidFill>
@@ -7492,7 +7492,7 @@
               <a:t>el momento en que se pudo parar</a:t>
             </a:r>
             <a:r>
-              <a:rPr sz="1600" b="0" i="0">
+              <a:rPr sz="2000" b="0" i="0">
                 <a:solidFill>
                   <a:srgbClr val="333333"/>
                 </a:solidFill>
@@ -8127,7 +8127,7 @@
               </a:spcAft>
             </a:pPr>
             <a:r>
-              <a:rPr sz="1300" b="0" i="0">
+              <a:rPr sz="1500" b="0" i="0">
                 <a:solidFill>
                   <a:srgbClr val="333333"/>
                 </a:solidFill>
@@ -8143,7 +8143,7 @@
               </a:spcAft>
             </a:pPr>
             <a:r>
-              <a:rPr sz="1300" b="0" i="0">
+              <a:rPr sz="1500" b="0" i="0">
                 <a:solidFill>
                   <a:srgbClr val="333333"/>
                 </a:solidFill>
@@ -8159,7 +8159,7 @@
               </a:spcAft>
             </a:pPr>
             <a:r>
-              <a:rPr sz="1300" b="0" i="0">
+              <a:rPr sz="1500" b="0" i="0">
                 <a:solidFill>
                   <a:srgbClr val="333333"/>
                 </a:solidFill>
@@ -8175,7 +8175,7 @@
               </a:spcAft>
             </a:pPr>
             <a:r>
-              <a:rPr sz="1300" b="0" i="0">
+              <a:rPr sz="1500" b="0" i="0">
                 <a:solidFill>
                   <a:srgbClr val="333333"/>
                 </a:solidFill>
@@ -8191,7 +8191,7 @@
               </a:spcAft>
             </a:pPr>
             <a:r>
-              <a:rPr sz="1300" b="0" i="0">
+              <a:rPr sz="1500" b="0" i="0">
                 <a:solidFill>
                   <a:srgbClr val="333333"/>
                 </a:solidFill>
@@ -8351,7 +8351,7 @@
               </a:spcAft>
             </a:pPr>
             <a:r>
-              <a:rPr sz="1300" b="0" i="0">
+              <a:rPr sz="1500" b="0" i="0">
                 <a:solidFill>
                   <a:srgbClr val="333333"/>
                 </a:solidFill>
@@ -8360,7 +8360,7 @@
               <a:t>–   </a:t>
             </a:r>
             <a:r>
-              <a:rPr sz="1300" b="1" i="0">
+              <a:rPr sz="1500" b="1" i="0">
                 <a:solidFill>
                   <a:srgbClr val="333333"/>
                 </a:solidFill>
@@ -8369,7 +8369,7 @@
               <a:t>Decidir bien con información incompleta</a:t>
             </a:r>
             <a:r>
-              <a:rPr sz="1300" b="0" i="0">
+              <a:rPr sz="1500" b="0" i="0">
                 <a:solidFill>
                   <a:srgbClr val="333333"/>
                 </a:solidFill>
@@ -8385,7 +8385,7 @@
               </a:spcAft>
             </a:pPr>
             <a:r>
-              <a:rPr sz="1300" b="0" i="0">
+              <a:rPr sz="1500" b="0" i="0">
                 <a:solidFill>
                   <a:srgbClr val="333333"/>
                 </a:solidFill>
@@ -8394,7 +8394,7 @@
               <a:t>–   Hay </a:t>
             </a:r>
             <a:r>
-              <a:rPr sz="1300" b="1" i="0">
+              <a:rPr sz="1500" b="1" i="0">
                 <a:solidFill>
                   <a:srgbClr val="333333"/>
                 </a:solidFill>
@@ -8403,7 +8403,7 @@
               <a:t>códigos escritos</a:t>
             </a:r>
             <a:r>
-              <a:rPr sz="1300" b="0" i="0">
+              <a:rPr sz="1500" b="0" i="0">
                 <a:solidFill>
                   <a:srgbClr val="333333"/>
                 </a:solidFill>
@@ -8419,7 +8419,7 @@
               </a:spcAft>
             </a:pPr>
             <a:r>
-              <a:rPr sz="1300" b="0" i="0">
+              <a:rPr sz="1500" b="0" i="0">
                 <a:solidFill>
                   <a:srgbClr val="333333"/>
                 </a:solidFill>
@@ -8428,7 +8428,7 @@
               <a:t>–   Se ve </a:t>
             </a:r>
             <a:r>
-              <a:rPr sz="1300" b="1" i="0">
+              <a:rPr sz="1500" b="1" i="0">
                 <a:solidFill>
                   <a:srgbClr val="333333"/>
                 </a:solidFill>
@@ -8437,7 +8437,7 @@
               <a:t>en el momento de decidir</a:t>
             </a:r>
             <a:r>
-              <a:rPr sz="1300" b="0" i="0">
+              <a:rPr sz="1500" b="0" i="0">
                 <a:solidFill>
                   <a:srgbClr val="333333"/>
                 </a:solidFill>
@@ -8453,7 +8453,7 @@
               </a:spcAft>
             </a:pPr>
             <a:r>
-              <a:rPr sz="1300" b="0" i="0">
+              <a:rPr sz="1500" b="0" i="0">
                 <a:solidFill>
                   <a:srgbClr val="333333"/>
                 </a:solidFill>
@@ -8462,7 +8462,7 @@
               <a:t>–   El que firma responde, y </a:t>
             </a:r>
             <a:r>
-              <a:rPr sz="1300" b="1" i="0">
+              <a:rPr sz="1500" b="1" i="0">
                 <a:solidFill>
                   <a:srgbClr val="333333"/>
                 </a:solidFill>
@@ -8471,7 +8471,7 @@
               <a:t>el que ejecuta también</a:t>
             </a:r>
             <a:r>
-              <a:rPr sz="1300" b="0" i="0">
+              <a:rPr sz="1500" b="0" i="0">
                 <a:solidFill>
                   <a:srgbClr val="333333"/>
                 </a:solidFill>
@@ -8487,7 +8487,7 @@
               </a:spcAft>
             </a:pPr>
             <a:r>
-              <a:rPr sz="1300" b="0" i="0">
+              <a:rPr sz="1500" b="0" i="0">
                 <a:solidFill>
                   <a:srgbClr val="333333"/>
                 </a:solidFill>
@@ -8496,7 +8496,7 @@
               <a:t>–   La ley es el </a:t>
             </a:r>
             <a:r>
-              <a:rPr sz="1300" b="1" i="0">
+              <a:rPr sz="1500" b="1" i="0">
                 <a:solidFill>
                   <a:srgbClr val="333333"/>
                 </a:solidFill>
@@ -8505,7 +8505,7 @@
               <a:t>mínimo</a:t>
             </a:r>
             <a:r>
-              <a:rPr sz="1300" b="0" i="0">
+              <a:rPr sz="1500" b="0" i="0">
                 <a:solidFill>
                   <a:srgbClr val="333333"/>
                 </a:solidFill>

--- a/Introduccion a la Ingenieria/Clases/Clase 4 - Principios eticos en la Ingenieria/Presentacion.pptx
+++ b/Introduccion a la Ingenieria/Clases/Clase 4 - Principios eticos en la Ingenieria/Presentacion.pptx
@@ -5827,7 +5827,7 @@
                 </a:solidFill>
                 <a:latin typeface="Calibri"/>
               </a:rPr>
-              <a:t>Para la sesión 5</a:t>
+              <a:t>Para la Clase 5</a:t>
             </a:r>
           </a:p>
         </p:txBody>
@@ -5961,7 +5961,7 @@
                 </a:solidFill>
                 <a:latin typeface="Calibri"/>
               </a:rPr>
-              <a:t>Sesión 5 · El rol del ingeniero en el contexto ambiental</a:t>
+              <a:t>Clase 5 · El rol del ingeniero en el contexto ambiental</a:t>
             </a:r>
             <a:r>
               <a:rPr sz="2000" b="0" i="0">
